--- a/site/clases/parte-2-deep-learning/113-optimizadores-momentum-nesterov-adagrad-rmsprop-adam-adamw/clase-113-optimizadores-momentum-nesterov-adagrad-rmsprop-adam-adamw-presentacion.pptx
+++ b/site/clases/parte-2-deep-learning/113-optimizadores-momentum-nesterov-adagrad-rmsprop-adam-adamw/clase-113-optimizadores-momentum-nesterov-adagrad-rmsprop-adam-adamw-presentacion.pptx
@@ -3272,7 +3272,7 @@
                 </a:solidFill>
                 <a:latin typeface="Segoe UI"/>
               </a:rPr>
-              <a:t>Parte: 2 — Deep Learning · Fuente: Géron, cap. 11 § Faster Optimizers + papers Lion (Chen et al. 2023), Sophia (Liu et al. 2023).  Duración estimada: 80 min.</a:t>
+              <a:t>Parte: 2 — Deep Learning · Fuente: Géron, cap. 11 § Faster Optimizers + papers Lion (Chen et al. 2023), Sophia (Liu et al. 2023).  Duración estimada: 80 min. · Nivel: Avanzado</a:t>
             </a:r>
           </a:p>
         </p:txBody>
@@ -3581,7 +3581,7 @@
                 </a:solidFill>
                 <a:latin typeface="Segoe UI"/>
               </a:rPr>
-              <a:t>Parte: 2 — Deep Learning · Fuente: Géron, cap. 11 § Faster Optimizers + papers Lion (Chen et al. 2023), Sophia (Liu et al. 2023).  Duración estimada: 80 min.</a:t>
+              <a:t>Parte: 2 — Deep Learning · Fuente: Géron, cap. 11 § Faster Optimizers + papers Lion (Chen et al. 2023), Sophia (Liu et al. 2023).  Duración estimada: 80 min. · Nivel: Avanzado</a:t>
             </a:r>
           </a:p>
         </p:txBody>
@@ -4845,7 +4845,7 @@
                 </a:solidFill>
                 <a:latin typeface="Segoe UI"/>
               </a:rPr>
-              <a:t>Primer bloque ejecutable del notebook.</a:t>
+              <a:t>De SGD a AdamW y Lion. Cada uno resuelve una limitación del anterior.</a:t>
             </a:r>
           </a:p>
         </p:txBody>
@@ -4932,7 +4932,330 @@
                 </a:solidFill>
                 <a:latin typeface="Courier New"/>
               </a:rPr>
-              <a:t># Imports y configuración inicial</a:t>
+              <a:t>import numpy as np</a:t>
+            </a:r>
+          </a:p>
+          <a:p>
+            <a:pPr>
+              <a:defRPr sz="1200" b="0">
+                <a:solidFill>
+                  <a:srgbClr val="F8FAFC"/>
+                </a:solidFill>
+                <a:latin typeface="Courier New"/>
+              </a:defRPr>
+            </a:pPr>
+            <a:r>
+              <a:rPr sz="1200" b="0">
+                <a:solidFill>
+                  <a:srgbClr val="F8FAFC"/>
+                </a:solidFill>
+                <a:latin typeface="Courier New"/>
+              </a:rPr>
+              <a:t>import tensorflow as tf</a:t>
+            </a:r>
+          </a:p>
+          <a:p>
+            <a:pPr>
+              <a:defRPr sz="1200" b="0">
+                <a:solidFill>
+                  <a:srgbClr val="F8FAFC"/>
+                </a:solidFill>
+                <a:latin typeface="Courier New"/>
+              </a:defRPr>
+            </a:pPr>
+            <a:r>
+              <a:rPr sz="1200" b="0">
+                <a:solidFill>
+                  <a:srgbClr val="F8FAFC"/>
+                </a:solidFill>
+                <a:latin typeface="Courier New"/>
+              </a:rPr>
+              <a:t>from tensorflow import keras</a:t>
+            </a:r>
+          </a:p>
+          <a:p>
+            <a:pPr>
+              <a:defRPr sz="1200" b="0">
+                <a:solidFill>
+                  <a:srgbClr val="F8FAFC"/>
+                </a:solidFill>
+                <a:latin typeface="Courier New"/>
+              </a:defRPr>
+            </a:pPr>
+            <a:r>
+              <a:rPr sz="1200" b="0">
+                <a:solidFill>
+                  <a:srgbClr val="F8FAFC"/>
+                </a:solidFill>
+                <a:latin typeface="Courier New"/>
+              </a:rPr>
+              <a:t>from tensorflow.keras import layers</a:t>
+            </a:r>
+          </a:p>
+          <a:p>
+            <a:pPr>
+              <a:defRPr sz="1200" b="0">
+                <a:solidFill>
+                  <a:srgbClr val="F8FAFC"/>
+                </a:solidFill>
+                <a:latin typeface="Courier New"/>
+              </a:defRPr>
+            </a:pPr>
+            <a:r>
+              <a:rPr sz="1200" b="0">
+                <a:solidFill>
+                  <a:srgbClr val="F8FAFC"/>
+                </a:solidFill>
+                <a:latin typeface="Courier New"/>
+              </a:rPr>
+              <a:t>keras.utils.set_random_seed(42)</a:t>
+            </a:r>
+          </a:p>
+          <a:p>
+            <a:pPr>
+              <a:defRPr sz="1200" b="0">
+                <a:solidFill>
+                  <a:srgbClr val="F8FAFC"/>
+                </a:solidFill>
+                <a:latin typeface="Courier New"/>
+              </a:defRPr>
+            </a:pPr>
+            <a:r>
+              <a:rPr sz="1200" b="0">
+                <a:solidFill>
+                  <a:srgbClr val="F8FAFC"/>
+                </a:solidFill>
+                <a:latin typeface="Courier New"/>
+              </a:rPr>
+              <a:t> </a:t>
+            </a:r>
+          </a:p>
+          <a:p>
+            <a:pPr>
+              <a:defRPr sz="1200" b="0">
+                <a:solidFill>
+                  <a:srgbClr val="F8FAFC"/>
+                </a:solidFill>
+                <a:latin typeface="Courier New"/>
+              </a:defRPr>
+            </a:pPr>
+            <a:r>
+              <a:rPr sz="1200" b="0">
+                <a:solidFill>
+                  <a:srgbClr val="F8FAFC"/>
+                </a:solidFill>
+                <a:latin typeface="Courier New"/>
+              </a:rPr>
+              <a:t>optimizadores = {</a:t>
+            </a:r>
+          </a:p>
+          <a:p>
+            <a:pPr>
+              <a:defRPr sz="1200" b="0">
+                <a:solidFill>
+                  <a:srgbClr val="F8FAFC"/>
+                </a:solidFill>
+                <a:latin typeface="Courier New"/>
+              </a:defRPr>
+            </a:pPr>
+            <a:r>
+              <a:rPr sz="1200" b="0">
+                <a:solidFill>
+                  <a:srgbClr val="F8FAFC"/>
+                </a:solidFill>
+                <a:latin typeface="Courier New"/>
+              </a:rPr>
+              <a:t>    "SGD":      keras.optimizers.SGD(learning_rate=0.01),</a:t>
+            </a:r>
+          </a:p>
+          <a:p>
+            <a:pPr>
+              <a:defRPr sz="1200" b="0">
+                <a:solidFill>
+                  <a:srgbClr val="F8FAFC"/>
+                </a:solidFill>
+                <a:latin typeface="Courier New"/>
+              </a:defRPr>
+            </a:pPr>
+            <a:r>
+              <a:rPr sz="1200" b="0">
+                <a:solidFill>
+                  <a:srgbClr val="F8FAFC"/>
+                </a:solidFill>
+                <a:latin typeface="Courier New"/>
+              </a:rPr>
+              <a:t>    "Momentum": keras.optimizers.SGD(learning_rate=0.01, momentum=0.9),</a:t>
+            </a:r>
+          </a:p>
+          <a:p>
+            <a:pPr>
+              <a:defRPr sz="1200" b="0">
+                <a:solidFill>
+                  <a:srgbClr val="F8FAFC"/>
+                </a:solidFill>
+                <a:latin typeface="Courier New"/>
+              </a:defRPr>
+            </a:pPr>
+            <a:r>
+              <a:rPr sz="1200" b="0">
+                <a:solidFill>
+                  <a:srgbClr val="F8FAFC"/>
+                </a:solidFill>
+                <a:latin typeface="Courier New"/>
+              </a:rPr>
+              <a:t>    "Nesterov": keras.optimizers.SGD(learning_rate=0.01, momentum=0.9, nesterov=True),</a:t>
+            </a:r>
+          </a:p>
+          <a:p>
+            <a:pPr>
+              <a:defRPr sz="1200" b="0">
+                <a:solidFill>
+                  <a:srgbClr val="F8FAFC"/>
+                </a:solidFill>
+                <a:latin typeface="Courier New"/>
+              </a:defRPr>
+            </a:pPr>
+            <a:r>
+              <a:rPr sz="1200" b="0">
+                <a:solidFill>
+                  <a:srgbClr val="F8FAFC"/>
+                </a:solidFill>
+                <a:latin typeface="Courier New"/>
+              </a:rPr>
+              <a:t>    "AdaGrad":  keras.optimizers.Adagrad(learning_rate=0.01),</a:t>
+            </a:r>
+          </a:p>
+          <a:p>
+            <a:pPr>
+              <a:defRPr sz="1200" b="0">
+                <a:solidFill>
+                  <a:srgbClr val="F8FAFC"/>
+                </a:solidFill>
+                <a:latin typeface="Courier New"/>
+              </a:defRPr>
+            </a:pPr>
+            <a:r>
+              <a:rPr sz="1200" b="0">
+                <a:solidFill>
+                  <a:srgbClr val="F8FAFC"/>
+                </a:solidFill>
+                <a:latin typeface="Courier New"/>
+              </a:rPr>
+              <a:t>    "RMSProp":  keras.optimizers.RMSprop(learning_rate=1e-3, rho=0.9),</a:t>
+            </a:r>
+          </a:p>
+          <a:p>
+            <a:pPr>
+              <a:defRPr sz="1200" b="0">
+                <a:solidFill>
+                  <a:srgbClr val="F8FAFC"/>
+                </a:solidFill>
+                <a:latin typeface="Courier New"/>
+              </a:defRPr>
+            </a:pPr>
+            <a:r>
+              <a:rPr sz="1200" b="0">
+                <a:solidFill>
+                  <a:srgbClr val="F8FAFC"/>
+                </a:solidFill>
+                <a:latin typeface="Courier New"/>
+              </a:rPr>
+              <a:t>    "Adam":     keras.optimizers.Adam(learning_rate=1e-3),</a:t>
+            </a:r>
+          </a:p>
+          <a:p>
+            <a:pPr>
+              <a:defRPr sz="1200" b="0">
+                <a:solidFill>
+                  <a:srgbClr val="F8FAFC"/>
+                </a:solidFill>
+                <a:latin typeface="Courier New"/>
+              </a:defRPr>
+            </a:pPr>
+            <a:r>
+              <a:rPr sz="1200" b="0">
+                <a:solidFill>
+                  <a:srgbClr val="F8FAFC"/>
+                </a:solidFill>
+                <a:latin typeface="Courier New"/>
+              </a:rPr>
+              <a:t>    "AdamW":    keras.optimizers.AdamW(learning_rate=1e-3, weight_decay=1e-2),</a:t>
+            </a:r>
+          </a:p>
+          <a:p>
+            <a:pPr>
+              <a:defRPr sz="1200" b="0">
+                <a:solidFill>
+                  <a:srgbClr val="F8FAFC"/>
+                </a:solidFill>
+                <a:latin typeface="Courier New"/>
+              </a:defRPr>
+            </a:pPr>
+            <a:r>
+              <a:rPr sz="1200" b="0">
+                <a:solidFill>
+                  <a:srgbClr val="F8FAFC"/>
+                </a:solidFill>
+                <a:latin typeface="Courier New"/>
+              </a:rPr>
+              <a:t>    "Lion":     keras.optimizers.Lion(learning_rate=1e-4, weight_decay=0.1),</a:t>
+            </a:r>
+          </a:p>
+          <a:p>
+            <a:pPr>
+              <a:defRPr sz="1200" b="0">
+                <a:solidFill>
+                  <a:srgbClr val="F8FAFC"/>
+                </a:solidFill>
+                <a:latin typeface="Courier New"/>
+              </a:defRPr>
+            </a:pPr>
+            <a:r>
+              <a:rPr sz="1200" b="0">
+                <a:solidFill>
+                  <a:srgbClr val="F8FAFC"/>
+                </a:solidFill>
+                <a:latin typeface="Courier New"/>
+              </a:rPr>
+              <a:t>}</a:t>
+            </a:r>
+          </a:p>
+          <a:p>
+            <a:pPr>
+              <a:defRPr sz="1200" b="0">
+                <a:solidFill>
+                  <a:srgbClr val="F8FAFC"/>
+                </a:solidFill>
+                <a:latin typeface="Courier New"/>
+              </a:defRPr>
+            </a:pPr>
+            <a:r>
+              <a:rPr sz="1200" b="0">
+                <a:solidFill>
+                  <a:srgbClr val="F8FAFC"/>
+                </a:solidFill>
+                <a:latin typeface="Courier New"/>
+              </a:rPr>
+              <a:t>for nombre, opt in optimizadores.items():</a:t>
+            </a:r>
+          </a:p>
+          <a:p>
+            <a:pPr>
+              <a:defRPr sz="1200" b="0">
+                <a:solidFill>
+                  <a:srgbClr val="F8FAFC"/>
+                </a:solidFill>
+                <a:latin typeface="Courier New"/>
+              </a:defRPr>
+            </a:pPr>
+            <a:r>
+              <a:rPr sz="1200" b="0">
+                <a:solidFill>
+                  <a:srgbClr val="F8FAFC"/>
+                </a:solidFill>
+                <a:latin typeface="Courier New"/>
+              </a:rPr>
+              <a:t>    print(f"{nombre:9s} -&gt; {type(opt).__name__}")</a:t>
             </a:r>
           </a:p>
         </p:txBody>
